--- a/catalog/samples/risk_table.pptx
+++ b/catalog/samples/risk_table.pptx
@@ -1472,7 +1472,7 @@
           </a:p>
           <a:p>
             <a:r>
-              <a:t>  "template_sha256": "d994e6ee7dc62547949d4e0022b1a10be8c4de9830d81c6ae4f7b7a62a152693"</a:t>
+              <a:t>  "template_sha256": "38919de3eae68be6100e484fc20d687d25f7df6a96b4cccc1e477ef01cc7c1a8"</a:t>
             </a:r>
           </a:p>
           <a:p>
